--- a/multicore04-4-virtualthreads.pptx
+++ b/multicore04-4-virtualthreads.pptx
@@ -5,15 +5,16 @@
     <p:sldMasterId id="2147483655" r:id="rId1"/>
   </p:sldMasterIdLst>
   <p:notesMasterIdLst>
-    <p:notesMasterId r:id="rId8"/>
+    <p:notesMasterId r:id="rId9"/>
   </p:notesMasterIdLst>
   <p:sldIdLst>
     <p:sldId id="346" r:id="rId2"/>
     <p:sldId id="347" r:id="rId3"/>
-    <p:sldId id="411" r:id="rId4"/>
-    <p:sldId id="408" r:id="rId5"/>
-    <p:sldId id="409" r:id="rId6"/>
-    <p:sldId id="410" r:id="rId7"/>
+    <p:sldId id="412" r:id="rId4"/>
+    <p:sldId id="411" r:id="rId5"/>
+    <p:sldId id="408" r:id="rId6"/>
+    <p:sldId id="409" r:id="rId7"/>
+    <p:sldId id="410" r:id="rId8"/>
   </p:sldIdLst>
   <p:sldSz cx="9144000" cy="6858000" type="screen4x3"/>
   <p:notesSz cx="7099300" cy="10234613"/>
@@ -7116,7 +7117,12 @@
             <p:ph idx="1"/>
           </p:nvPr>
         </p:nvSpPr>
-        <p:spPr/>
+        <p:spPr>
+          <a:xfrm>
+            <a:off x="457200" y="1600200"/>
+            <a:ext cx="8507288" cy="4525963"/>
+          </a:xfrm>
+        </p:spPr>
         <p:txBody>
           <a:bodyPr/>
           <a:lstStyle/>
@@ -7165,6 +7171,13 @@
             <a:r>
               <a:rPr lang="en-US" altLang="ko-KR" sz="2000" dirty="0"/>
               <a:t>Requires minimal changes</a:t>
+            </a:r>
+          </a:p>
+          <a:p>
+            <a:pPr lvl="1"/>
+            <a:r>
+              <a:rPr lang="en-US" altLang="ko-KR" sz="2000" dirty="0"/>
+              <a:t>A virtual thread is still a real Thread from your code perspective</a:t>
             </a:r>
           </a:p>
           <a:p>
@@ -7249,7 +7262,7 @@
         </p:nvSpPr>
         <p:spPr>
           <a:xfrm>
-            <a:off x="395536" y="1196752"/>
+            <a:off x="395536" y="1567333"/>
             <a:ext cx="8507288" cy="4525963"/>
           </a:xfrm>
         </p:spPr>
@@ -7259,7 +7272,7 @@
           <a:p>
             <a:r>
               <a:rPr lang="en" altLang="ko-KR" b="1" dirty="0"/>
-              <a:t>Platform threads</a:t>
+              <a:t>Platform threads (traditional Java threads)</a:t>
             </a:r>
           </a:p>
           <a:p>
@@ -7277,6 +7290,30 @@
             </a:r>
           </a:p>
           <a:p>
+            <a:pPr marL="457200" lvl="1" indent="0">
+              <a:buNone/>
+            </a:pPr>
+            <a:r>
+              <a:rPr lang="en" altLang="ko-KR" sz="2400" dirty="0"/>
+              <a:t>   (memory and scheduling overhead)</a:t>
+            </a:r>
+          </a:p>
+          <a:p>
+            <a:pPr lvl="1"/>
+            <a:r>
+              <a:rPr lang="en-US" altLang="ko-KR" sz="2400" dirty="0"/>
+              <a:t>S</a:t>
+            </a:r>
+            <a:r>
+              <a:rPr lang="en" altLang="ko-KR" sz="2400" dirty="0" err="1"/>
+              <a:t>ystems</a:t>
+            </a:r>
+            <a:r>
+              <a:rPr lang="en" altLang="ko-KR" sz="2400" dirty="0"/>
+              <a:t> usually limit the number with thread pools</a:t>
+            </a:r>
+          </a:p>
+          <a:p>
             <a:pPr lvl="1"/>
             <a:r>
               <a:rPr lang="en" altLang="ko-KR" sz="2400" dirty="0"/>
@@ -7291,6 +7328,100 @@
             </a:r>
           </a:p>
           <a:p>
+            <a:endParaRPr kumimoji="1" lang="ko-KR" altLang="en-US" dirty="0"/>
+          </a:p>
+        </p:txBody>
+      </p:sp>
+    </p:spTree>
+    <p:extLst>
+      <p:ext uri="{BB962C8B-B14F-4D97-AF65-F5344CB8AC3E}">
+        <p14:creationId xmlns:p14="http://schemas.microsoft.com/office/powerpoint/2010/main" val="1351593982"/>
+      </p:ext>
+    </p:extLst>
+  </p:cSld>
+  <p:clrMapOvr>
+    <a:masterClrMapping/>
+  </p:clrMapOvr>
+</p:sld>
+</file>
+
+<file path=ppt/slides/slide4.xml><?xml version="1.0" encoding="utf-8"?>
+<p:sld xmlns:a="http://schemas.openxmlformats.org/drawingml/2006/main" xmlns:r="http://schemas.openxmlformats.org/officeDocument/2006/relationships" xmlns:p="http://schemas.openxmlformats.org/presentationml/2006/main">
+  <p:cSld>
+    <p:spTree>
+      <p:nvGrpSpPr>
+        <p:cNvPr id="1" name=""/>
+        <p:cNvGrpSpPr/>
+        <p:nvPr/>
+      </p:nvGrpSpPr>
+      <p:grpSpPr>
+        <a:xfrm>
+          <a:off x="0" y="0"/>
+          <a:ext cx="0" cy="0"/>
+          <a:chOff x="0" y="0"/>
+          <a:chExt cx="0" cy="0"/>
+        </a:xfrm>
+      </p:grpSpPr>
+      <p:sp>
+        <p:nvSpPr>
+          <p:cNvPr id="2" name="제목 1">
+            <a:extLst>
+              <a:ext uri="{FF2B5EF4-FFF2-40B4-BE49-F238E27FC236}">
+                <a16:creationId xmlns:a16="http://schemas.microsoft.com/office/drawing/2014/main" id="{027ED418-4F5B-BA71-D481-B16F34B53507}"/>
+              </a:ext>
+            </a:extLst>
+          </p:cNvPr>
+          <p:cNvSpPr>
+            <a:spLocks noGrp="1"/>
+          </p:cNvSpPr>
+          <p:nvPr>
+            <p:ph type="title"/>
+          </p:nvPr>
+        </p:nvSpPr>
+        <p:spPr>
+          <a:xfrm>
+            <a:off x="457200" y="188640"/>
+            <a:ext cx="8229600" cy="1143000"/>
+          </a:xfrm>
+        </p:spPr>
+        <p:txBody>
+          <a:bodyPr/>
+          <a:lstStyle/>
+          <a:p>
+            <a:r>
+              <a:rPr lang="en-US" altLang="ko-KR" sz="3600" b="1" u="sng" dirty="0"/>
+              <a:t>Virtual threads vs Platform threads</a:t>
+            </a:r>
+            <a:endParaRPr kumimoji="1" lang="ko-KR" altLang="en-US" sz="3600" b="1" u="sng" dirty="0"/>
+          </a:p>
+        </p:txBody>
+      </p:sp>
+      <p:sp>
+        <p:nvSpPr>
+          <p:cNvPr id="3" name="내용 개체 틀 2">
+            <a:extLst>
+              <a:ext uri="{FF2B5EF4-FFF2-40B4-BE49-F238E27FC236}">
+                <a16:creationId xmlns:a16="http://schemas.microsoft.com/office/drawing/2014/main" id="{D281D976-37F2-C4E7-665B-17BA3A44FDC9}"/>
+              </a:ext>
+            </a:extLst>
+          </p:cNvPr>
+          <p:cNvSpPr>
+            <a:spLocks noGrp="1"/>
+          </p:cNvSpPr>
+          <p:nvPr>
+            <p:ph idx="1"/>
+          </p:nvPr>
+        </p:nvSpPr>
+        <p:spPr>
+          <a:xfrm>
+            <a:off x="395536" y="1567333"/>
+            <a:ext cx="8507288" cy="4525963"/>
+          </a:xfrm>
+        </p:spPr>
+        <p:txBody>
+          <a:bodyPr/>
+          <a:lstStyle/>
+          <a:p>
             <a:r>
               <a:rPr lang="en" altLang="ko-KR" b="1" dirty="0"/>
               <a:t>Virtual threads</a:t>
@@ -7318,11 +7449,69 @@
             </a:r>
           </a:p>
           <a:p>
+            <a:pPr marL="457200" lvl="1" indent="0">
+              <a:buNone/>
+            </a:pPr>
+            <a:r>
+              <a:rPr lang="en" altLang="ko-KR" dirty="0"/>
+              <a:t> (JVM can schedule a very large number of virtual threads onto a much </a:t>
+            </a:r>
+            <a:r>
+              <a:rPr lang="en" altLang="ko-KR" dirty="0" err="1"/>
+              <a:t>smal</a:t>
+            </a:r>
+            <a:r>
+              <a:rPr lang="en-US" altLang="ko-KR" dirty="0"/>
+              <a:t>l</a:t>
+            </a:r>
+            <a:r>
+              <a:rPr lang="en" altLang="ko-KR" dirty="0"/>
+              <a:t>er set of OS threads)</a:t>
+            </a:r>
+          </a:p>
+          <a:p>
+            <a:pPr marL="457200" lvl="1" indent="0">
+              <a:buNone/>
+            </a:pPr>
+            <a:endParaRPr lang="en" altLang="ko-KR" dirty="0"/>
+          </a:p>
+          <a:p>
             <a:pPr lvl="1"/>
             <a:r>
               <a:rPr lang="en" altLang="ko-KR" dirty="0"/>
-              <a:t>Best for request-per-thread or task-per-thread designs. </a:t>
-            </a:r>
+              <a:t>Best for request-per-thread or task-per-thread designs (at high concurrency)</a:t>
+            </a:r>
+          </a:p>
+          <a:p>
+            <a:pPr lvl="2"/>
+            <a:r>
+              <a:rPr lang="en-US" altLang="ko-KR" dirty="0"/>
+              <a:t>D</a:t>
+            </a:r>
+            <a:r>
+              <a:rPr lang="en" altLang="ko-KR" dirty="0" err="1"/>
+              <a:t>atabase</a:t>
+            </a:r>
+            <a:r>
+              <a:rPr lang="en" altLang="ko-KR" dirty="0"/>
+              <a:t> queries, HTTP calls (web requests), </a:t>
+            </a:r>
+            <a:r>
+              <a:rPr lang="en" altLang="ko-KR" dirty="0" err="1"/>
+              <a:t>etc</a:t>
+            </a:r>
+            <a:endParaRPr lang="en" altLang="ko-KR" dirty="0"/>
+          </a:p>
+          <a:p>
+            <a:pPr lvl="2"/>
+            <a:r>
+              <a:rPr lang="en" altLang="ko-KR" dirty="0"/>
+              <a:t>with platform threads, these can be expensive</a:t>
+            </a:r>
+          </a:p>
+          <a:p>
+            <a:pPr lvl="2"/>
+            <a:endParaRPr lang="en" altLang="ko-KR" dirty="0"/>
           </a:p>
           <a:p>
             <a:endParaRPr kumimoji="1" lang="ko-KR" altLang="en-US" dirty="0"/>
@@ -7342,7 +7531,7 @@
 </p:sld>
 </file>
 
-<file path=ppt/slides/slide4.xml><?xml version="1.0" encoding="utf-8"?>
+<file path=ppt/slides/slide5.xml><?xml version="1.0" encoding="utf-8"?>
 <p:sld xmlns:a="http://schemas.openxmlformats.org/drawingml/2006/main" xmlns:r="http://schemas.openxmlformats.org/officeDocument/2006/relationships" xmlns:p="http://schemas.openxmlformats.org/presentationml/2006/main">
   <p:cSld>
     <p:spTree>
@@ -7489,7 +7678,7 @@
 </p:sld>
 </file>
 
-<file path=ppt/slides/slide5.xml><?xml version="1.0" encoding="utf-8"?>
+<file path=ppt/slides/slide6.xml><?xml version="1.0" encoding="utf-8"?>
 <p:sld xmlns:a="http://schemas.openxmlformats.org/drawingml/2006/main" xmlns:r="http://schemas.openxmlformats.org/officeDocument/2006/relationships" xmlns:p="http://schemas.openxmlformats.org/presentationml/2006/main">
   <p:cSld>
     <p:spTree>
@@ -7648,7 +7837,7 @@
 </p:sld>
 </file>
 
-<file path=ppt/slides/slide6.xml><?xml version="1.0" encoding="utf-8"?>
+<file path=ppt/slides/slide7.xml><?xml version="1.0" encoding="utf-8"?>
 <p:sld xmlns:a="http://schemas.openxmlformats.org/drawingml/2006/main" xmlns:r="http://schemas.openxmlformats.org/officeDocument/2006/relationships" xmlns:p="http://schemas.openxmlformats.org/presentationml/2006/main">
   <p:cSld>
     <p:spTree>
@@ -7730,7 +7919,7 @@
         <p:spPr>
           <a:xfrm>
             <a:off x="457200" y="1600201"/>
-            <a:ext cx="8229600" cy="2332855"/>
+            <a:ext cx="8229600" cy="3412976"/>
           </a:xfrm>
           <a:solidFill>
             <a:schemeClr val="bg2">
@@ -7922,6 +8111,77 @@
             <a:pPr marL="0" indent="0">
               <a:buNone/>
             </a:pPr>
+            <a:r>
+              <a:rPr lang="en" altLang="ko-KR" sz="1800" b="1" dirty="0">
+                <a:latin typeface="Courier New" panose="02070309020205020404" pitchFamily="49" charset="0"/>
+                <a:cs typeface="Courier New" panose="02070309020205020404" pitchFamily="49" charset="0"/>
+              </a:rPr>
+              <a:t>// Thread </a:t>
+            </a:r>
+            <a:r>
+              <a:rPr lang="en" altLang="ko-KR" sz="1800" b="1" dirty="0" err="1">
+                <a:latin typeface="Courier New" panose="02070309020205020404" pitchFamily="49" charset="0"/>
+                <a:cs typeface="Courier New" panose="02070309020205020404" pitchFamily="49" charset="0"/>
+              </a:rPr>
+              <a:t>vThread</a:t>
+            </a:r>
+            <a:r>
+              <a:rPr lang="en" altLang="ko-KR" sz="1800" b="1" dirty="0">
+                <a:latin typeface="Courier New" panose="02070309020205020404" pitchFamily="49" charset="0"/>
+                <a:cs typeface="Courier New" panose="02070309020205020404" pitchFamily="49" charset="0"/>
+              </a:rPr>
+              <a:t> = </a:t>
+            </a:r>
+            <a:r>
+              <a:rPr lang="en" altLang="ko-KR" sz="1800" b="1" dirty="0" err="1">
+                <a:latin typeface="Courier New" panose="02070309020205020404" pitchFamily="49" charset="0"/>
+                <a:cs typeface="Courier New" panose="02070309020205020404" pitchFamily="49" charset="0"/>
+              </a:rPr>
+              <a:t>Thread.startVirtualThread</a:t>
+            </a:r>
+            <a:r>
+              <a:rPr lang="en" altLang="ko-KR" sz="1800" b="1" dirty="0">
+                <a:latin typeface="Courier New" panose="02070309020205020404" pitchFamily="49" charset="0"/>
+                <a:cs typeface="Courier New" panose="02070309020205020404" pitchFamily="49" charset="0"/>
+              </a:rPr>
+              <a:t>(runnable);</a:t>
+            </a:r>
+          </a:p>
+          <a:p>
+            <a:pPr marL="0" indent="0">
+              <a:buNone/>
+            </a:pPr>
+            <a:r>
+              <a:rPr lang="en" altLang="ko-KR" sz="1800" b="1" dirty="0">
+                <a:latin typeface="Courier New" panose="02070309020205020404" pitchFamily="49" charset="0"/>
+                <a:cs typeface="Courier New" panose="02070309020205020404" pitchFamily="49" charset="0"/>
+              </a:rPr>
+              <a:t>…</a:t>
+            </a:r>
+          </a:p>
+          <a:p>
+            <a:pPr marL="0" indent="0">
+              <a:buNone/>
+            </a:pPr>
+            <a:r>
+              <a:rPr lang="en" altLang="ko-KR" sz="1800" b="1" dirty="0" err="1">
+                <a:latin typeface="Courier New" panose="02070309020205020404" pitchFamily="49" charset="0"/>
+                <a:cs typeface="Courier New" panose="02070309020205020404" pitchFamily="49" charset="0"/>
+              </a:rPr>
+              <a:t>vThread.join</a:t>
+            </a:r>
+            <a:r>
+              <a:rPr lang="en" altLang="ko-KR" sz="1800" b="1" dirty="0">
+                <a:latin typeface="Courier New" panose="02070309020205020404" pitchFamily="49" charset="0"/>
+                <a:cs typeface="Courier New" panose="02070309020205020404" pitchFamily="49" charset="0"/>
+              </a:rPr>
+              <a:t>();   // join</a:t>
+            </a:r>
+          </a:p>
+          <a:p>
+            <a:pPr marL="0" indent="0">
+              <a:buNone/>
+            </a:pPr>
             <a:endParaRPr kumimoji="1" lang="ko-KR" altLang="en-US" sz="1800" b="1" dirty="0">
               <a:latin typeface="Courier New" panose="02070309020205020404" pitchFamily="49" charset="0"/>
               <a:cs typeface="Courier New" panose="02070309020205020404" pitchFamily="49" charset="0"/>
@@ -7931,10 +8191,10 @@
       </p:sp>
       <p:sp>
         <p:nvSpPr>
-          <p:cNvPr id="4" name="TextBox 3">
+          <p:cNvPr id="6" name="TextBox 5">
             <a:extLst>
               <a:ext uri="{FF2B5EF4-FFF2-40B4-BE49-F238E27FC236}">
-                <a16:creationId xmlns:a16="http://schemas.microsoft.com/office/drawing/2014/main" id="{CCF31566-78AA-270D-760D-7274263BC4EC}"/>
+                <a16:creationId xmlns:a16="http://schemas.microsoft.com/office/drawing/2014/main" id="{F6EA4564-27CB-DD6D-94E7-58BC0F8FCF5D}"/>
               </a:ext>
             </a:extLst>
           </p:cNvPr>
@@ -7943,8 +8203,8 @@
         </p:nvSpPr>
         <p:spPr>
           <a:xfrm>
-            <a:off x="467544" y="4353431"/>
-            <a:ext cx="3421129" cy="461665"/>
+            <a:off x="467544" y="5229200"/>
+            <a:ext cx="9047670" cy="830997"/>
           </a:xfrm>
           <a:prstGeom prst="rect">
             <a:avLst/>
@@ -7963,18 +8223,24 @@
             </a:pPr>
             <a:r>
               <a:rPr kumimoji="1" lang="en-US" altLang="ko-KR" sz="2400" b="1" u="sng" dirty="0"/>
-              <a:t>Join a Virtual Thread</a:t>
-            </a:r>
-            <a:endParaRPr kumimoji="1" lang="ko-KR" altLang="en-US" sz="2400" b="1" u="sng" dirty="0"/>
+              <a:t>Creating a thread pool that uses virtual threads</a:t>
+            </a:r>
+          </a:p>
+          <a:p>
+            <a:r>
+              <a:rPr lang="en-US" altLang="ko-KR" sz="2400" b="1" dirty="0"/>
+              <a:t>(usually you do not specify the number of virtual threads)</a:t>
+            </a:r>
+            <a:endParaRPr kumimoji="1" lang="ko-KR" altLang="en-US" sz="2400" b="1" dirty="0"/>
           </a:p>
         </p:txBody>
       </p:sp>
       <p:sp>
         <p:nvSpPr>
-          <p:cNvPr id="5" name="내용 개체 틀 2">
+          <p:cNvPr id="7" name="내용 개체 틀 2">
             <a:extLst>
               <a:ext uri="{FF2B5EF4-FFF2-40B4-BE49-F238E27FC236}">
-                <a16:creationId xmlns:a16="http://schemas.microsoft.com/office/drawing/2014/main" id="{DB20535E-C571-80F8-1EBF-352DF21ECA4E}"/>
+                <a16:creationId xmlns:a16="http://schemas.microsoft.com/office/drawing/2014/main" id="{F51E95AE-1DD5-CFF6-27FE-FAD0D9D214FF}"/>
               </a:ext>
             </a:extLst>
           </p:cNvPr>
@@ -7985,8 +8251,8 @@
         </p:nvSpPr>
         <p:spPr bwMode="auto">
           <a:xfrm>
-            <a:off x="467544" y="4797152"/>
-            <a:ext cx="8229600" cy="680070"/>
+            <a:off x="467544" y="6156176"/>
+            <a:ext cx="8568952" cy="461665"/>
           </a:xfrm>
           <a:prstGeom prst="rect">
             <a:avLst/>
@@ -8224,379 +8490,28 @@
               <a:buNone/>
             </a:pPr>
             <a:r>
-              <a:rPr lang="en" altLang="ko-KR" sz="1800" b="1" dirty="0">
-                <a:latin typeface="Courier New" panose="02070309020205020404" pitchFamily="49" charset="0"/>
-                <a:cs typeface="Courier New" panose="02070309020205020404" pitchFamily="49" charset="0"/>
-              </a:rPr>
-              <a:t>Thread </a:t>
-            </a:r>
-            <a:r>
-              <a:rPr lang="en" altLang="ko-KR" sz="1800" b="1" dirty="0" err="1">
-                <a:latin typeface="Courier New" panose="02070309020205020404" pitchFamily="49" charset="0"/>
-                <a:cs typeface="Courier New" panose="02070309020205020404" pitchFamily="49" charset="0"/>
-              </a:rPr>
-              <a:t>vThread</a:t>
-            </a:r>
-            <a:r>
-              <a:rPr lang="en" altLang="ko-KR" sz="1800" b="1" dirty="0">
-                <a:latin typeface="Courier New" panose="02070309020205020404" pitchFamily="49" charset="0"/>
-                <a:cs typeface="Courier New" panose="02070309020205020404" pitchFamily="49" charset="0"/>
-              </a:rPr>
-              <a:t> = </a:t>
-            </a:r>
-            <a:r>
-              <a:rPr lang="en" altLang="ko-KR" sz="1800" b="1" dirty="0" err="1">
-                <a:latin typeface="Courier New" panose="02070309020205020404" pitchFamily="49" charset="0"/>
-                <a:cs typeface="Courier New" panose="02070309020205020404" pitchFamily="49" charset="0"/>
-              </a:rPr>
-              <a:t>Thread.ofVirtual</a:t>
-            </a:r>
-            <a:r>
-              <a:rPr lang="en" altLang="ko-KR" sz="1800" b="1" dirty="0">
-                <a:latin typeface="Courier New" panose="02070309020205020404" pitchFamily="49" charset="0"/>
-                <a:cs typeface="Courier New" panose="02070309020205020404" pitchFamily="49" charset="0"/>
-              </a:rPr>
-              <a:t>().start(runnable);</a:t>
-            </a:r>
-          </a:p>
-          <a:p>
-            <a:pPr marL="0" indent="0">
-              <a:buNone/>
-            </a:pPr>
-            <a:r>
-              <a:rPr lang="en" altLang="ko-KR" sz="1800" b="1" dirty="0" err="1">
-                <a:latin typeface="Courier New" panose="02070309020205020404" pitchFamily="49" charset="0"/>
-                <a:cs typeface="Courier New" panose="02070309020205020404" pitchFamily="49" charset="0"/>
-              </a:rPr>
-              <a:t>vThread.join</a:t>
-            </a:r>
-            <a:r>
-              <a:rPr lang="en" altLang="ko-KR" sz="1800" b="1" dirty="0">
-                <a:latin typeface="Courier New" panose="02070309020205020404" pitchFamily="49" charset="0"/>
-                <a:cs typeface="Courier New" panose="02070309020205020404" pitchFamily="49" charset="0"/>
-              </a:rPr>
-              <a:t>();</a:t>
-            </a:r>
-          </a:p>
-        </p:txBody>
-      </p:sp>
-      <p:sp>
-        <p:nvSpPr>
-          <p:cNvPr id="6" name="TextBox 5">
-            <a:extLst>
-              <a:ext uri="{FF2B5EF4-FFF2-40B4-BE49-F238E27FC236}">
-                <a16:creationId xmlns:a16="http://schemas.microsoft.com/office/drawing/2014/main" id="{F6EA4564-27CB-DD6D-94E7-58BC0F8FCF5D}"/>
-              </a:ext>
-            </a:extLst>
-          </p:cNvPr>
-          <p:cNvSpPr txBox="1"/>
-          <p:nvPr/>
-        </p:nvSpPr>
-        <p:spPr>
-          <a:xfrm>
-            <a:off x="467544" y="5559623"/>
-            <a:ext cx="7364517" cy="461665"/>
-          </a:xfrm>
-          <a:prstGeom prst="rect">
-            <a:avLst/>
-          </a:prstGeom>
-          <a:noFill/>
-        </p:spPr>
-        <p:txBody>
-          <a:bodyPr wrap="none" rtlCol="0">
-            <a:spAutoFit/>
-          </a:bodyPr>
-          <a:lstStyle/>
-          <a:p>
-            <a:pPr marL="285750" indent="-285750">
-              <a:buFont typeface="Arial" panose="020B0604020202020204" pitchFamily="34" charset="0"/>
-              <a:buChar char="•"/>
-            </a:pPr>
-            <a:r>
-              <a:rPr kumimoji="1" lang="en-US" altLang="ko-KR" sz="2400" b="1" u="sng" dirty="0"/>
-              <a:t>Creating a thread pool that uses virtual threads</a:t>
-            </a:r>
-            <a:endParaRPr kumimoji="1" lang="ko-KR" altLang="en-US" sz="2400" b="1" u="sng" dirty="0"/>
-          </a:p>
-        </p:txBody>
-      </p:sp>
-      <p:sp>
-        <p:nvSpPr>
-          <p:cNvPr id="7" name="내용 개체 틀 2">
-            <a:extLst>
-              <a:ext uri="{FF2B5EF4-FFF2-40B4-BE49-F238E27FC236}">
-                <a16:creationId xmlns:a16="http://schemas.microsoft.com/office/drawing/2014/main" id="{F51E95AE-1DD5-CFF6-27FE-FAD0D9D214FF}"/>
-              </a:ext>
-            </a:extLst>
-          </p:cNvPr>
-          <p:cNvSpPr txBox="1">
-            <a:spLocks/>
-          </p:cNvSpPr>
-          <p:nvPr/>
-        </p:nvSpPr>
-        <p:spPr bwMode="auto">
-          <a:xfrm>
-            <a:off x="467544" y="6061298"/>
-            <a:ext cx="8229600" cy="680070"/>
-          </a:xfrm>
-          <a:prstGeom prst="rect">
-            <a:avLst/>
-          </a:prstGeom>
-          <a:solidFill>
-            <a:schemeClr val="bg2">
-              <a:lumMod val="20000"/>
-              <a:lumOff val="80000"/>
-            </a:schemeClr>
-          </a:solidFill>
-          <a:ln>
-            <a:noFill/>
-          </a:ln>
-          <a:extLst>
-            <a:ext uri="{91240B29-F687-4F45-9708-019B960494DF}">
-              <a14:hiddenLine xmlns:a14="http://schemas.microsoft.com/office/drawing/2010/main" w="9525">
-                <a:solidFill>
-                  <a:srgbClr val="000000"/>
-                </a:solidFill>
-                <a:miter lim="800000"/>
-                <a:headEnd/>
-                <a:tailEnd/>
-              </a14:hiddenLine>
-            </a:ext>
-          </a:extLst>
-        </p:spPr>
-        <p:txBody>
-          <a:bodyPr vert="horz" wrap="square" lIns="91440" tIns="45720" rIns="91440" bIns="45720" numCol="1" anchor="t" anchorCtr="0" compatLnSpc="1">
-            <a:prstTxWarp prst="textNoShape">
-              <a:avLst/>
-            </a:prstTxWarp>
-          </a:bodyPr>
-          <a:lstStyle>
-            <a:lvl1pPr marL="342900" indent="-342900" algn="l" rtl="0" eaLnBrk="0" fontAlgn="t" latinLnBrk="1" hangingPunct="0">
-              <a:spcBef>
-                <a:spcPct val="20000"/>
-              </a:spcBef>
-              <a:spcAft>
-                <a:spcPct val="0"/>
-              </a:spcAft>
-              <a:buClr>
-                <a:schemeClr val="hlink"/>
-              </a:buClr>
-              <a:buSzPct val="80000"/>
-              <a:buFont typeface="Wingdings" pitchFamily="2" charset="2"/>
-              <a:buChar char="n"/>
-              <a:defRPr kumimoji="1" sz="3000">
-                <a:solidFill>
-                  <a:schemeClr val="tx1"/>
-                </a:solidFill>
-                <a:latin typeface="+mn-lt"/>
-                <a:ea typeface="+mn-ea"/>
-                <a:cs typeface="+mn-cs"/>
-              </a:defRPr>
-            </a:lvl1pPr>
-            <a:lvl2pPr marL="742950" indent="-285750" algn="l" rtl="0" eaLnBrk="0" fontAlgn="t" latinLnBrk="1" hangingPunct="0">
-              <a:spcBef>
-                <a:spcPct val="20000"/>
-              </a:spcBef>
-              <a:spcAft>
-                <a:spcPct val="0"/>
-              </a:spcAft>
-              <a:buClr>
-                <a:schemeClr val="accent2"/>
-              </a:buClr>
-              <a:buSzPct val="70000"/>
-              <a:buFont typeface="Wingdings" pitchFamily="2" charset="2"/>
-              <a:buChar char="n"/>
-              <a:defRPr kumimoji="1" sz="2600">
-                <a:solidFill>
-                  <a:schemeClr val="tx1"/>
-                </a:solidFill>
-                <a:latin typeface="+mn-lt"/>
-                <a:ea typeface="+mn-ea"/>
-                <a:cs typeface="+mn-cs"/>
-              </a:defRPr>
-            </a:lvl2pPr>
-            <a:lvl3pPr marL="1143000" indent="-228600" algn="l" rtl="0" eaLnBrk="0" fontAlgn="t" latinLnBrk="1" hangingPunct="0">
-              <a:spcBef>
-                <a:spcPct val="20000"/>
-              </a:spcBef>
-              <a:spcAft>
-                <a:spcPct val="0"/>
-              </a:spcAft>
-              <a:buClr>
-                <a:schemeClr val="accent1"/>
-              </a:buClr>
-              <a:buSzPct val="70000"/>
-              <a:buFont typeface="Wingdings" pitchFamily="2" charset="2"/>
-              <a:buChar char="n"/>
-              <a:defRPr kumimoji="1" sz="2300">
-                <a:solidFill>
-                  <a:schemeClr val="tx1"/>
-                </a:solidFill>
-                <a:latin typeface="+mn-lt"/>
-                <a:ea typeface="+mn-ea"/>
-                <a:cs typeface="+mn-cs"/>
-              </a:defRPr>
-            </a:lvl3pPr>
-            <a:lvl4pPr marL="1600200" indent="-228600" algn="l" rtl="0" eaLnBrk="0" fontAlgn="t" latinLnBrk="1" hangingPunct="0">
-              <a:spcBef>
-                <a:spcPct val="20000"/>
-              </a:spcBef>
-              <a:spcAft>
-                <a:spcPct val="0"/>
-              </a:spcAft>
-              <a:buClr>
-                <a:schemeClr val="folHlink"/>
-              </a:buClr>
-              <a:buSzPct val="70000"/>
-              <a:buFont typeface="Wingdings" pitchFamily="2" charset="2"/>
-              <a:buChar char="n"/>
-              <a:defRPr kumimoji="1" sz="2000">
-                <a:solidFill>
-                  <a:schemeClr val="tx1"/>
-                </a:solidFill>
-                <a:latin typeface="+mn-lt"/>
-                <a:ea typeface="+mn-ea"/>
-                <a:cs typeface="+mn-cs"/>
-              </a:defRPr>
-            </a:lvl4pPr>
-            <a:lvl5pPr marL="2057400" indent="-228600" algn="l" rtl="0" eaLnBrk="0" fontAlgn="t" latinLnBrk="1" hangingPunct="0">
-              <a:spcBef>
-                <a:spcPct val="20000"/>
-              </a:spcBef>
-              <a:spcAft>
-                <a:spcPct val="0"/>
-              </a:spcAft>
-              <a:buClr>
-                <a:schemeClr val="folHlink"/>
-              </a:buClr>
-              <a:buSzPct val="70000"/>
-              <a:buFont typeface="Wingdings" pitchFamily="2" charset="2"/>
-              <a:buChar char="n"/>
-              <a:defRPr kumimoji="1" sz="2000">
-                <a:solidFill>
-                  <a:schemeClr val="tx1"/>
-                </a:solidFill>
-                <a:latin typeface="+mn-lt"/>
-                <a:ea typeface="+mn-ea"/>
-                <a:cs typeface="+mn-cs"/>
-              </a:defRPr>
-            </a:lvl5pPr>
-            <a:lvl6pPr marL="2514600" indent="-228600" algn="l" rtl="0" fontAlgn="t" latinLnBrk="1">
-              <a:spcBef>
-                <a:spcPct val="20000"/>
-              </a:spcBef>
-              <a:spcAft>
-                <a:spcPct val="0"/>
-              </a:spcAft>
-              <a:buClr>
-                <a:schemeClr val="folHlink"/>
-              </a:buClr>
-              <a:buSzPct val="70000"/>
-              <a:buFont typeface="Wingdings" pitchFamily="2" charset="2"/>
-              <a:buChar char="n"/>
-              <a:defRPr kumimoji="1" sz="2000">
-                <a:solidFill>
-                  <a:schemeClr val="tx1"/>
-                </a:solidFill>
-                <a:latin typeface="+mn-lt"/>
-                <a:ea typeface="+mn-ea"/>
-                <a:cs typeface="+mn-cs"/>
-              </a:defRPr>
-            </a:lvl6pPr>
-            <a:lvl7pPr marL="2971800" indent="-228600" algn="l" rtl="0" fontAlgn="t" latinLnBrk="1">
-              <a:spcBef>
-                <a:spcPct val="20000"/>
-              </a:spcBef>
-              <a:spcAft>
-                <a:spcPct val="0"/>
-              </a:spcAft>
-              <a:buClr>
-                <a:schemeClr val="folHlink"/>
-              </a:buClr>
-              <a:buSzPct val="70000"/>
-              <a:buFont typeface="Wingdings" pitchFamily="2" charset="2"/>
-              <a:buChar char="n"/>
-              <a:defRPr kumimoji="1" sz="2000">
-                <a:solidFill>
-                  <a:schemeClr val="tx1"/>
-                </a:solidFill>
-                <a:latin typeface="+mn-lt"/>
-                <a:ea typeface="+mn-ea"/>
-                <a:cs typeface="+mn-cs"/>
-              </a:defRPr>
-            </a:lvl7pPr>
-            <a:lvl8pPr marL="3429000" indent="-228600" algn="l" rtl="0" fontAlgn="t" latinLnBrk="1">
-              <a:spcBef>
-                <a:spcPct val="20000"/>
-              </a:spcBef>
-              <a:spcAft>
-                <a:spcPct val="0"/>
-              </a:spcAft>
-              <a:buClr>
-                <a:schemeClr val="folHlink"/>
-              </a:buClr>
-              <a:buSzPct val="70000"/>
-              <a:buFont typeface="Wingdings" pitchFamily="2" charset="2"/>
-              <a:buChar char="n"/>
-              <a:defRPr kumimoji="1" sz="2000">
-                <a:solidFill>
-                  <a:schemeClr val="tx1"/>
-                </a:solidFill>
-                <a:latin typeface="+mn-lt"/>
-                <a:ea typeface="+mn-ea"/>
-                <a:cs typeface="+mn-cs"/>
-              </a:defRPr>
-            </a:lvl8pPr>
-            <a:lvl9pPr marL="3886200" indent="-228600" algn="l" rtl="0" fontAlgn="t" latinLnBrk="1">
-              <a:spcBef>
-                <a:spcPct val="20000"/>
-              </a:spcBef>
-              <a:spcAft>
-                <a:spcPct val="0"/>
-              </a:spcAft>
-              <a:buClr>
-                <a:schemeClr val="folHlink"/>
-              </a:buClr>
-              <a:buSzPct val="70000"/>
-              <a:buFont typeface="Wingdings" pitchFamily="2" charset="2"/>
-              <a:buChar char="n"/>
-              <a:defRPr kumimoji="1" sz="2000">
-                <a:solidFill>
-                  <a:schemeClr val="tx1"/>
-                </a:solidFill>
-                <a:latin typeface="+mn-lt"/>
-                <a:ea typeface="+mn-ea"/>
-                <a:cs typeface="+mn-cs"/>
-              </a:defRPr>
-            </a:lvl9pPr>
-          </a:lstStyle>
-          <a:p>
-            <a:pPr marL="0" indent="0">
-              <a:buNone/>
-            </a:pPr>
-            <a:r>
-              <a:rPr lang="en" altLang="ko-KR" sz="1800" b="1" dirty="0" err="1">
+              <a:rPr lang="en" altLang="ko-KR" sz="1700" b="1" dirty="0" err="1">
                 <a:latin typeface="Courier New" panose="02070309020205020404" pitchFamily="49" charset="0"/>
                 <a:cs typeface="Courier New" panose="02070309020205020404" pitchFamily="49" charset="0"/>
               </a:rPr>
               <a:t>ExecutorService</a:t>
             </a:r>
             <a:r>
-              <a:rPr lang="en" altLang="ko-KR" sz="1800" b="1" dirty="0">
+              <a:rPr lang="en" altLang="ko-KR" sz="1700" b="1" dirty="0">
                 <a:latin typeface="Courier New" panose="02070309020205020404" pitchFamily="49" charset="0"/>
                 <a:cs typeface="Courier New" panose="02070309020205020404" pitchFamily="49" charset="0"/>
               </a:rPr>
-              <a:t> executor = </a:t>
-            </a:r>
-            <a:r>
-              <a:rPr lang="en" altLang="ko-KR" sz="1800" b="1" dirty="0" err="1">
+              <a:t> e = </a:t>
+            </a:r>
+            <a:r>
+              <a:rPr lang="en" altLang="ko-KR" sz="1700" b="1" dirty="0" err="1">
                 <a:latin typeface="Courier New" panose="02070309020205020404" pitchFamily="49" charset="0"/>
                 <a:cs typeface="Courier New" panose="02070309020205020404" pitchFamily="49" charset="0"/>
               </a:rPr>
               <a:t>Executors.newVirtualThreadPerTaskExecutor</a:t>
             </a:r>
             <a:r>
-              <a:rPr lang="en" altLang="ko-KR" sz="1800" b="1" dirty="0">
+              <a:rPr lang="en" altLang="ko-KR" sz="1700" b="1" dirty="0">
                 <a:latin typeface="Courier New" panose="02070309020205020404" pitchFamily="49" charset="0"/>
                 <a:cs typeface="Courier New" panose="02070309020205020404" pitchFamily="49" charset="0"/>
               </a:rPr>
